--- a/docs/cas voice for walth management.pptx
+++ b/docs/cas voice for walth management.pptx
@@ -265,7 +265,7 @@
           <a:p>
             <a:fld id="{A7B23420-F84C-4D9B-88EC-0CEEEB4A27CB}" type="datetimeFigureOut">
               <a:rPr lang="en-GB" smtClean="0"/>
-              <a:t>04/08/2026</a:t>
+              <a:t>05/08/2026</a:t>
             </a:fld>
             <a:endParaRPr lang="en-GB"/>
           </a:p>
@@ -465,7 +465,7 @@
           <a:p>
             <a:fld id="{A7B23420-F84C-4D9B-88EC-0CEEEB4A27CB}" type="datetimeFigureOut">
               <a:rPr lang="en-GB" smtClean="0"/>
-              <a:t>04/08/2026</a:t>
+              <a:t>05/08/2026</a:t>
             </a:fld>
             <a:endParaRPr lang="en-GB"/>
           </a:p>
@@ -675,7 +675,7 @@
           <a:p>
             <a:fld id="{A7B23420-F84C-4D9B-88EC-0CEEEB4A27CB}" type="datetimeFigureOut">
               <a:rPr lang="en-GB" smtClean="0"/>
-              <a:t>04/08/2026</a:t>
+              <a:t>05/08/2026</a:t>
             </a:fld>
             <a:endParaRPr lang="en-GB"/>
           </a:p>
@@ -875,7 +875,7 @@
           <a:p>
             <a:fld id="{A7B23420-F84C-4D9B-88EC-0CEEEB4A27CB}" type="datetimeFigureOut">
               <a:rPr lang="en-GB" smtClean="0"/>
-              <a:t>04/08/2026</a:t>
+              <a:t>05/08/2026</a:t>
             </a:fld>
             <a:endParaRPr lang="en-GB"/>
           </a:p>
@@ -1151,7 +1151,7 @@
           <a:p>
             <a:fld id="{A7B23420-F84C-4D9B-88EC-0CEEEB4A27CB}" type="datetimeFigureOut">
               <a:rPr lang="en-GB" smtClean="0"/>
-              <a:t>04/08/2026</a:t>
+              <a:t>05/08/2026</a:t>
             </a:fld>
             <a:endParaRPr lang="en-GB"/>
           </a:p>
@@ -1419,7 +1419,7 @@
           <a:p>
             <a:fld id="{A7B23420-F84C-4D9B-88EC-0CEEEB4A27CB}" type="datetimeFigureOut">
               <a:rPr lang="en-GB" smtClean="0"/>
-              <a:t>04/08/2026</a:t>
+              <a:t>05/08/2026</a:t>
             </a:fld>
             <a:endParaRPr lang="en-GB"/>
           </a:p>
@@ -1834,7 +1834,7 @@
           <a:p>
             <a:fld id="{A7B23420-F84C-4D9B-88EC-0CEEEB4A27CB}" type="datetimeFigureOut">
               <a:rPr lang="en-GB" smtClean="0"/>
-              <a:t>04/08/2026</a:t>
+              <a:t>05/08/2026</a:t>
             </a:fld>
             <a:endParaRPr lang="en-GB"/>
           </a:p>
@@ -1976,7 +1976,7 @@
           <a:p>
             <a:fld id="{A7B23420-F84C-4D9B-88EC-0CEEEB4A27CB}" type="datetimeFigureOut">
               <a:rPr lang="en-GB" smtClean="0"/>
-              <a:t>04/08/2026</a:t>
+              <a:t>05/08/2026</a:t>
             </a:fld>
             <a:endParaRPr lang="en-GB"/>
           </a:p>
@@ -2089,7 +2089,7 @@
           <a:p>
             <a:fld id="{A7B23420-F84C-4D9B-88EC-0CEEEB4A27CB}" type="datetimeFigureOut">
               <a:rPr lang="en-GB" smtClean="0"/>
-              <a:t>04/08/2026</a:t>
+              <a:t>05/08/2026</a:t>
             </a:fld>
             <a:endParaRPr lang="en-GB"/>
           </a:p>
@@ -2402,7 +2402,7 @@
           <a:p>
             <a:fld id="{A7B23420-F84C-4D9B-88EC-0CEEEB4A27CB}" type="datetimeFigureOut">
               <a:rPr lang="en-GB" smtClean="0"/>
-              <a:t>04/08/2026</a:t>
+              <a:t>05/08/2026</a:t>
             </a:fld>
             <a:endParaRPr lang="en-GB"/>
           </a:p>
@@ -2691,7 +2691,7 @@
           <a:p>
             <a:fld id="{A7B23420-F84C-4D9B-88EC-0CEEEB4A27CB}" type="datetimeFigureOut">
               <a:rPr lang="en-GB" smtClean="0"/>
-              <a:t>04/08/2026</a:t>
+              <a:t>05/08/2026</a:t>
             </a:fld>
             <a:endParaRPr lang="en-GB"/>
           </a:p>
@@ -2934,7 +2934,7 @@
           <a:p>
             <a:fld id="{A7B23420-F84C-4D9B-88EC-0CEEEB4A27CB}" type="datetimeFigureOut">
               <a:rPr lang="en-GB" smtClean="0"/>
-              <a:t>04/08/2026</a:t>
+              <a:t>05/08/2026</a:t>
             </a:fld>
             <a:endParaRPr lang="en-GB"/>
           </a:p>
@@ -3649,7 +3649,7 @@
         <p:spPr>
           <a:xfrm>
             <a:off x="567466" y="1005792"/>
-            <a:ext cx="11547532" cy="3970318"/>
+            <a:ext cx="11547532" cy="4524315"/>
           </a:xfrm>
           <a:prstGeom prst="rect">
             <a:avLst/>
@@ -3735,7 +3735,7 @@
             </a:pPr>
             <a:r>
               <a:rPr lang="en-GB" dirty="0"/>
-              <a:t>Silent Mobile Phone Carrier Handshake Authentication (</a:t>
+              <a:t>Silent Mobile Phone Carrier Handshake Authentication  + SIM Swap (</a:t>
             </a:r>
             <a:r>
               <a:rPr lang="en-GB" i="1" dirty="0"/>
@@ -3762,16 +3762,16 @@
                 </a:solidFill>
                 <a:latin typeface="Aptos" panose="020B0004020202020204" pitchFamily="34" charset="0"/>
               </a:rPr>
-              <a:t>Real-time Biometric Identification (</a:t>
-            </a:r>
-            <a:r>
-              <a:rPr lang="en-GB" i="1" dirty="0">
+              <a:t>Device Biometric Identification (</a:t>
+            </a:r>
+            <a:r>
+              <a:rPr lang="en-GB" i="1" dirty="0" err="1">
                 <a:solidFill>
                   <a:srgbClr val="000000"/>
                 </a:solidFill>
                 <a:latin typeface="Aptos" panose="020B0004020202020204" pitchFamily="34" charset="0"/>
               </a:rPr>
-              <a:t>CAS Conversation Intelligence</a:t>
+              <a:t>WebAuthn</a:t>
             </a:r>
             <a:r>
               <a:rPr lang="en-GB" dirty="0">
@@ -3803,6 +3803,43 @@
               <a:buChar char="•"/>
             </a:pPr>
             <a:r>
+              <a:rPr lang="en-GB" dirty="0">
+                <a:solidFill>
+                  <a:srgbClr val="000000"/>
+                </a:solidFill>
+                <a:latin typeface="Aptos" panose="020B0004020202020204" pitchFamily="34" charset="0"/>
+              </a:rPr>
+              <a:t>Use an </a:t>
+            </a:r>
+            <a:r>
+              <a:rPr lang="en-GB" dirty="0"/>
+              <a:t>AML Data Provider to fetch legal name/address of verified </a:t>
+            </a:r>
+            <a:r>
+              <a:rPr lang="en-GB"/>
+              <a:t>phone number</a:t>
+            </a:r>
+            <a:br>
+              <a:rPr lang="en-GB" dirty="0">
+                <a:solidFill>
+                  <a:srgbClr val="000000"/>
+                </a:solidFill>
+                <a:latin typeface="Aptos" panose="020B0004020202020204" pitchFamily="34" charset="0"/>
+              </a:rPr>
+            </a:br>
+            <a:endParaRPr lang="en-GB" dirty="0">
+              <a:solidFill>
+                <a:srgbClr val="000000"/>
+              </a:solidFill>
+              <a:latin typeface="Aptos" panose="020B0004020202020204" pitchFamily="34" charset="0"/>
+            </a:endParaRPr>
+          </a:p>
+          <a:p>
+            <a:pPr marL="742950" lvl="1" indent="-285750" fontAlgn="base">
+              <a:buFont typeface="Arial" panose="020B0604020202020204" pitchFamily="34" charset="0"/>
+              <a:buChar char="•"/>
+            </a:pPr>
+            <a:r>
               <a:rPr lang="en-GB" b="0" dirty="0">
                 <a:solidFill>
                   <a:srgbClr val="000000"/>
@@ -3829,7 +3866,7 @@
                 <a:effectLst/>
                 <a:latin typeface="Aptos" panose="020B0004020202020204" pitchFamily="34" charset="0"/>
               </a:rPr>
-              <a:t>onnection between HNW Client and Bank (</a:t>
+              <a:t>onnection between HNW Client and human Financial Adviser (</a:t>
             </a:r>
             <a:r>
               <a:rPr lang="en-GB" b="0" i="1" dirty="0">
